--- a/public/fun/pack/pptx/reviewpro/보장점검양식프리미엄_17_부부점검_코발트아이보리.pptx
+++ b/public/fun/pack/pptx/reviewpro/보장점검양식프리미엄_17_부부점검_코발트아이보리.pptx
@@ -112,12 +112,12 @@
   <p:extLst>
     <p:ext uri="{521415D9-36F7-43E2-AB2F-B90AF26B5E84}">
       <p14:sectionLst xmlns:p14="http://schemas.microsoft.com/office/powerpoint/2010/main">
-        <p14:section name="시작" id="{6089C01F-0DE2-40A4-9EB9-9A5B921CE905}">
+        <p14:section name="시작" id="{6ED5C0D1-F838-40CA-919A-EB56362B0936}">
           <p14:sldIdLst>
             <p14:sldId id="256"/>
           </p14:sldIdLst>
         </p14:section>
-        <p14:section name="본문" id="{06FB3BBD-7572-4C3D-8884-FF6EB3B90A73}">
+        <p14:section name="본문" id="{4C6BB584-2256-49E5-9CBC-04E2457132E9}">
           <p14:sldIdLst>
             <p14:sldId id="257"/>
             <p14:sldId id="258"/>
@@ -1504,7 +1504,7 @@
             </a:lvl1pPr>
           </a:lstStyle>
           <a:p>
-            <a:fld id="{4A0563EA-62BE-4D78-B8A0-09DD983E9D51}" type="slidenum">
+            <a:fld id="{713FC89E-A8F4-4DD9-817E-4CDC1CC021A4}" type="slidenum">
               <a:rPr lang="en-US"/>
               <a:t>‹#›</a:t>
             </a:fld>
@@ -2171,7 +2171,7 @@
             </a:lvl1pPr>
           </a:lstStyle>
           <a:p>
-            <a:fld id="{192D643D-EE2C-4BE3-AC87-E26FFBB2BF55}" type="slidenum">
+            <a:fld id="{157E5745-7036-44D3-BCFE-FE8D8C613CB6}" type="slidenum">
               <a:rPr lang="en-US"/>
               <a:t>‹#›</a:t>
             </a:fld>
@@ -2920,7 +2920,7 @@
             </a:lvl1pPr>
           </a:lstStyle>
           <a:p>
-            <a:fld id="{70D0B67E-E63E-4B0C-95A3-0ED5368E56EB}" type="slidenum">
+            <a:fld id="{068C5D26-75FA-4507-9C6C-85A8E2F1CA44}" type="slidenum">
               <a:rPr lang="en-US"/>
               <a:t>‹#›</a:t>
             </a:fld>
@@ -3805,7 +3805,7 @@
           <a:p>
             <a:r>
               <a:rPr lang="ko-KR"/>
-              <a:t>부부 점검 · 0000. 00. 00</a:t>
+              <a:t>부부 점검 · 날짜 입력</a:t>
             </a:r>
           </a:p>
           <a:p>
@@ -3918,7 +3918,7 @@
           <a:bodyPr/>
           <a:lstStyle/>
           <a:p>
-            <a:fld id="{499782FA-321E-432A-82F3-E7B25BAE7E3F}" type="slidenum">
+            <a:fld id="{F068E0DB-72EE-4540-8491-54FC208D14C4}" type="slidenum">
               <a:rPr lang="en-US"/>
               <a:t>‹#›</a:t>
             </a:fld>
@@ -4653,7 +4653,7 @@
           <a:bodyPr/>
           <a:lstStyle/>
           <a:p>
-            <a:fld id="{6361C246-47E1-446F-AC90-5A02915F9C7E}" type="slidenum">
+            <a:fld id="{3B529604-1C5B-425C-BF1D-37A84B37CE33}" type="slidenum">
               <a:rPr lang="en-US"/>
               <a:t>‹#›</a:t>
             </a:fld>
@@ -6181,7 +6181,7 @@
           <a:bodyPr/>
           <a:lstStyle/>
           <a:p>
-            <a:fld id="{37E5515C-B57D-4B20-B311-C9E5A093AD98}" type="slidenum">
+            <a:fld id="{36B9D718-76BC-4363-A4D2-270AB9ADCEE9}" type="slidenum">
               <a:rPr lang="en-US"/>
               <a:t>‹#›</a:t>
             </a:fld>
@@ -7753,7 +7753,7 @@
           <a:bodyPr/>
           <a:lstStyle/>
           <a:p>
-            <a:fld id="{070F015D-6CA2-4FCA-9078-02939ECA9418}" type="slidenum">
+            <a:fld id="{C285519B-C296-4021-8E33-EAB32F0C9382}" type="slidenum">
               <a:rPr lang="en-US"/>
               <a:t>‹#›</a:t>
             </a:fld>
@@ -8775,7 +8775,7 @@
           <a:bodyPr/>
           <a:lstStyle/>
           <a:p>
-            <a:fld id="{4F835F29-F007-4C3A-AF26-295AB2E17904}" type="slidenum">
+            <a:fld id="{D6C48241-083C-47B9-A57A-09BCFD5FCCF1}" type="slidenum">
               <a:rPr lang="en-US"/>
               <a:t>‹#›</a:t>
             </a:fld>
